--- a/inst/templates/SNEE_ppt_template.pptx
+++ b/inst/templates/SNEE_ppt_template.pptx
@@ -3716,8 +3716,7 @@
 <file path=customXml/item1.xml><?xml version="1.0" encoding="utf-8"?>
 <p:properties xmlns:p="http://schemas.microsoft.com/office/2006/metadata/properties" xmlns:xsi="http://www.w3.org/2001/XMLSchema-instance" xmlns:pc="http://schemas.microsoft.com/office/infopath/2007/PartnerControls">
   <documentManagement>
-    <TaxCatchAll xmlns="65bf6443-d88a-4841-95d2-0bd668e1d4ca" xsi:nil="true"/>
-    <lcf76f155ced4ddcb4097134ff3c332f xmlns="a214f09a-5dcf-407b-9b35-f755cc36fe16">
+    <lcf76f155ced4ddcb4097134ff3c332f xmlns="a640a533-9898-472d-937d-07109c3fe566">
       <Terms xmlns="http://schemas.microsoft.com/office/infopath/2007/PartnerControls"/>
     </lcf76f155ced4ddcb4097134ff3c332f>
   </documentManagement>
@@ -3734,28 +3733,27 @@
 </file>
 
 <file path=customXml/item3.xml><?xml version="1.0" encoding="utf-8"?>
-<ct:contentTypeSchema xmlns:ct="http://schemas.microsoft.com/office/2006/metadata/contentType" xmlns:ma="http://schemas.microsoft.com/office/2006/metadata/properties/metaAttributes" ct:_="" ma:_="" ma:contentTypeName="Document" ma:contentTypeID="0x010100653B6C449DF5C64DAF2A2D0028A3C219" ma:contentTypeVersion="13" ma:contentTypeDescription="Create a new document." ma:contentTypeScope="" ma:versionID="b96dd5a8627aacc4228a58af63e6f0ce">
-  <xsd:schema xmlns:xsd="http://www.w3.org/2001/XMLSchema" xmlns:xs="http://www.w3.org/2001/XMLSchema" xmlns:p="http://schemas.microsoft.com/office/2006/metadata/properties" xmlns:ns2="a214f09a-5dcf-407b-9b35-f755cc36fe16" xmlns:ns3="65bf6443-d88a-4841-95d2-0bd668e1d4ca" targetNamespace="http://schemas.microsoft.com/office/2006/metadata/properties" ma:root="true" ma:fieldsID="38becf705a1297c5bf4857645801b7cd" ns2:_="" ns3:_="">
-    <xsd:import namespace="a214f09a-5dcf-407b-9b35-f755cc36fe16"/>
-    <xsd:import namespace="65bf6443-d88a-4841-95d2-0bd668e1d4ca"/>
+<ct:contentTypeSchema xmlns:ct="http://schemas.microsoft.com/office/2006/metadata/contentType" xmlns:ma="http://schemas.microsoft.com/office/2006/metadata/properties/metaAttributes" ct:_="" ma:_="" ma:contentTypeName="Document" ma:contentTypeID="0x0101006D66EBAC73943E47AC7780AA9B39DCF6" ma:contentTypeVersion="12" ma:contentTypeDescription="Create a new document." ma:contentTypeScope="" ma:versionID="001aff11e7d7db068e96fb2b0ac6fda1">
+  <xsd:schema xmlns:xsd="http://www.w3.org/2001/XMLSchema" xmlns:xs="http://www.w3.org/2001/XMLSchema" xmlns:p="http://schemas.microsoft.com/office/2006/metadata/properties" xmlns:ns2="34b3de72-f603-4a9e-8152-a33fe660ed5b" xmlns:ns3="a640a533-9898-472d-937d-07109c3fe566" targetNamespace="http://schemas.microsoft.com/office/2006/metadata/properties" ma:root="true" ma:fieldsID="ce9215234151397b01289e5f5c1e2c57" ns2:_="" ns3:_="">
+    <xsd:import namespace="34b3de72-f603-4a9e-8152-a33fe660ed5b"/>
+    <xsd:import namespace="a640a533-9898-472d-937d-07109c3fe566"/>
     <xsd:element name="properties">
       <xsd:complexType>
         <xsd:sequence>
           <xsd:element name="documentManagement">
             <xsd:complexType>
               <xsd:all>
-                <xsd:element ref="ns2:MediaServiceMetadata" minOccurs="0"/>
-                <xsd:element ref="ns2:MediaServiceFastMetadata" minOccurs="0"/>
-                <xsd:element ref="ns2:MediaServiceObjectDetectorVersions" minOccurs="0"/>
-                <xsd:element ref="ns3:SharedWithUsers" minOccurs="0"/>
-                <xsd:element ref="ns3:SharedWithDetails" minOccurs="0"/>
-                <xsd:element ref="ns2:lcf76f155ced4ddcb4097134ff3c332f" minOccurs="0"/>
-                <xsd:element ref="ns3:TaxCatchAll" minOccurs="0"/>
-                <xsd:element ref="ns2:MediaServiceOCR" minOccurs="0"/>
-                <xsd:element ref="ns2:MediaServiceGenerationTime" minOccurs="0"/>
-                <xsd:element ref="ns2:MediaServiceEventHashCode" minOccurs="0"/>
-                <xsd:element ref="ns2:MediaServiceDateTaken" minOccurs="0"/>
-                <xsd:element ref="ns2:MediaServiceSearchProperties" minOccurs="0"/>
+                <xsd:element ref="ns2:SharedWithUsers" minOccurs="0"/>
+                <xsd:element ref="ns2:SharedWithDetails" minOccurs="0"/>
+                <xsd:element ref="ns3:MediaServiceMetadata" minOccurs="0"/>
+                <xsd:element ref="ns3:MediaServiceFastMetadata" minOccurs="0"/>
+                <xsd:element ref="ns3:MediaServiceSearchProperties" minOccurs="0"/>
+                <xsd:element ref="ns3:MediaServiceObjectDetectorVersions" minOccurs="0"/>
+                <xsd:element ref="ns3:lcf76f155ced4ddcb4097134ff3c332f" minOccurs="0"/>
+                <xsd:element ref="ns3:MediaServiceDateTaken" minOccurs="0"/>
+                <xsd:element ref="ns3:MediaServiceOCR" minOccurs="0"/>
+                <xsd:element ref="ns3:MediaServiceGenerationTime" minOccurs="0"/>
+                <xsd:element ref="ns3:MediaServiceEventHashCode" minOccurs="0"/>
               </xsd:all>
             </xsd:complexType>
           </xsd:element>
@@ -3763,63 +3761,10 @@
       </xsd:complexType>
     </xsd:element>
   </xsd:schema>
-  <xsd:schema xmlns:xsd="http://www.w3.org/2001/XMLSchema" xmlns:xs="http://www.w3.org/2001/XMLSchema" xmlns:dms="http://schemas.microsoft.com/office/2006/documentManagement/types" xmlns:pc="http://schemas.microsoft.com/office/infopath/2007/PartnerControls" targetNamespace="a214f09a-5dcf-407b-9b35-f755cc36fe16" elementFormDefault="qualified">
+  <xsd:schema xmlns:xsd="http://www.w3.org/2001/XMLSchema" xmlns:xs="http://www.w3.org/2001/XMLSchema" xmlns:dms="http://schemas.microsoft.com/office/2006/documentManagement/types" xmlns:pc="http://schemas.microsoft.com/office/infopath/2007/PartnerControls" targetNamespace="34b3de72-f603-4a9e-8152-a33fe660ed5b" elementFormDefault="qualified">
     <xsd:import namespace="http://schemas.microsoft.com/office/2006/documentManagement/types"/>
     <xsd:import namespace="http://schemas.microsoft.com/office/infopath/2007/PartnerControls"/>
-    <xsd:element name="MediaServiceMetadata" ma:index="8" nillable="true" ma:displayName="MediaServiceMetadata" ma:hidden="true" ma:internalName="MediaServiceMetadata" ma:readOnly="true">
-      <xsd:simpleType>
-        <xsd:restriction base="dms:Note"/>
-      </xsd:simpleType>
-    </xsd:element>
-    <xsd:element name="MediaServiceFastMetadata" ma:index="9" nillable="true" ma:displayName="MediaServiceFastMetadata" ma:hidden="true" ma:internalName="MediaServiceFastMetadata" ma:readOnly="true">
-      <xsd:simpleType>
-        <xsd:restriction base="dms:Note"/>
-      </xsd:simpleType>
-    </xsd:element>
-    <xsd:element name="MediaServiceObjectDetectorVersions" ma:index="10" nillable="true" ma:displayName="MediaServiceObjectDetectorVersions" ma:hidden="true" ma:indexed="true" ma:internalName="MediaServiceObjectDetectorVersions" ma:readOnly="true">
-      <xsd:simpleType>
-        <xsd:restriction base="dms:Text"/>
-      </xsd:simpleType>
-    </xsd:element>
-    <xsd:element name="lcf76f155ced4ddcb4097134ff3c332f" ma:index="14" nillable="true" ma:taxonomy="true" ma:internalName="lcf76f155ced4ddcb4097134ff3c332f" ma:taxonomyFieldName="MediaServiceImageTags" ma:displayName="Image Tags" ma:readOnly="false" ma:fieldId="{5cf76f15-5ced-4ddc-b409-7134ff3c332f}" ma:taxonomyMulti="true" ma:sspId="a06bf4c4-4eb2-40f1-bc0e-6b8189d6fc30" ma:termSetId="09814cd3-568e-fe90-9814-8d621ff8fb84" ma:anchorId="fba54fb3-c3e1-fe81-a776-ca4b69148c4d" ma:open="true" ma:isKeyword="false">
-      <xsd:complexType>
-        <xsd:sequence>
-          <xsd:element ref="pc:Terms" minOccurs="0" maxOccurs="1"/>
-        </xsd:sequence>
-      </xsd:complexType>
-    </xsd:element>
-    <xsd:element name="MediaServiceOCR" ma:index="16" nillable="true" ma:displayName="Extracted Text" ma:internalName="MediaServiceOCR" ma:readOnly="true">
-      <xsd:simpleType>
-        <xsd:restriction base="dms:Note">
-          <xsd:maxLength value="255"/>
-        </xsd:restriction>
-      </xsd:simpleType>
-    </xsd:element>
-    <xsd:element name="MediaServiceGenerationTime" ma:index="17" nillable="true" ma:displayName="MediaServiceGenerationTime" ma:hidden="true" ma:internalName="MediaServiceGenerationTime" ma:readOnly="true">
-      <xsd:simpleType>
-        <xsd:restriction base="dms:Text"/>
-      </xsd:simpleType>
-    </xsd:element>
-    <xsd:element name="MediaServiceEventHashCode" ma:index="18" nillable="true" ma:displayName="MediaServiceEventHashCode" ma:hidden="true" ma:internalName="MediaServiceEventHashCode" ma:readOnly="true">
-      <xsd:simpleType>
-        <xsd:restriction base="dms:Text"/>
-      </xsd:simpleType>
-    </xsd:element>
-    <xsd:element name="MediaServiceDateTaken" ma:index="19" nillable="true" ma:displayName="MediaServiceDateTaken" ma:hidden="true" ma:indexed="true" ma:internalName="MediaServiceDateTaken" ma:readOnly="true">
-      <xsd:simpleType>
-        <xsd:restriction base="dms:Text"/>
-      </xsd:simpleType>
-    </xsd:element>
-    <xsd:element name="MediaServiceSearchProperties" ma:index="20" nillable="true" ma:displayName="MediaServiceSearchProperties" ma:hidden="true" ma:internalName="MediaServiceSearchProperties" ma:readOnly="true">
-      <xsd:simpleType>
-        <xsd:restriction base="dms:Note"/>
-      </xsd:simpleType>
-    </xsd:element>
-  </xsd:schema>
-  <xsd:schema xmlns:xsd="http://www.w3.org/2001/XMLSchema" xmlns:xs="http://www.w3.org/2001/XMLSchema" xmlns:dms="http://schemas.microsoft.com/office/2006/documentManagement/types" xmlns:pc="http://schemas.microsoft.com/office/infopath/2007/PartnerControls" targetNamespace="65bf6443-d88a-4841-95d2-0bd668e1d4ca" elementFormDefault="qualified">
-    <xsd:import namespace="http://schemas.microsoft.com/office/2006/documentManagement/types"/>
-    <xsd:import namespace="http://schemas.microsoft.com/office/infopath/2007/PartnerControls"/>
-    <xsd:element name="SharedWithUsers" ma:index="11" nillable="true" ma:displayName="Shared With" ma:internalName="SharedWithUsers" ma:readOnly="true">
+    <xsd:element name="SharedWithUsers" ma:index="8" nillable="true" ma:displayName="Shared With" ma:internalName="SharedWithUsers" ma:readOnly="true">
       <xsd:complexType>
         <xsd:complexContent>
           <xsd:extension base="dms:UserMulti">
@@ -3838,23 +3783,65 @@
         </xsd:complexContent>
       </xsd:complexType>
     </xsd:element>
-    <xsd:element name="SharedWithDetails" ma:index="12" nillable="true" ma:displayName="Shared With Details" ma:internalName="SharedWithDetails" ma:readOnly="true">
+    <xsd:element name="SharedWithDetails" ma:index="9" nillable="true" ma:displayName="Shared With Details" ma:internalName="SharedWithDetails" ma:readOnly="true">
       <xsd:simpleType>
         <xsd:restriction base="dms:Note">
           <xsd:maxLength value="255"/>
         </xsd:restriction>
       </xsd:simpleType>
     </xsd:element>
-    <xsd:element name="TaxCatchAll" ma:index="15" nillable="true" ma:displayName="Taxonomy Catch All Column" ma:hidden="true" ma:list="{7727e2db-431e-46b3-996c-a21d9a16617d}" ma:internalName="TaxCatchAll" ma:showField="CatchAllData" ma:web="65bf6443-d88a-4841-95d2-0bd668e1d4ca">
+  </xsd:schema>
+  <xsd:schema xmlns:xsd="http://www.w3.org/2001/XMLSchema" xmlns:xs="http://www.w3.org/2001/XMLSchema" xmlns:dms="http://schemas.microsoft.com/office/2006/documentManagement/types" xmlns:pc="http://schemas.microsoft.com/office/infopath/2007/PartnerControls" targetNamespace="a640a533-9898-472d-937d-07109c3fe566" elementFormDefault="qualified">
+    <xsd:import namespace="http://schemas.microsoft.com/office/2006/documentManagement/types"/>
+    <xsd:import namespace="http://schemas.microsoft.com/office/infopath/2007/PartnerControls"/>
+    <xsd:element name="MediaServiceMetadata" ma:index="10" nillable="true" ma:displayName="MediaServiceMetadata" ma:hidden="true" ma:internalName="MediaServiceMetadata" ma:readOnly="true">
+      <xsd:simpleType>
+        <xsd:restriction base="dms:Note"/>
+      </xsd:simpleType>
+    </xsd:element>
+    <xsd:element name="MediaServiceFastMetadata" ma:index="11" nillable="true" ma:displayName="MediaServiceFastMetadata" ma:hidden="true" ma:internalName="MediaServiceFastMetadata" ma:readOnly="true">
+      <xsd:simpleType>
+        <xsd:restriction base="dms:Note"/>
+      </xsd:simpleType>
+    </xsd:element>
+    <xsd:element name="MediaServiceSearchProperties" ma:index="12" nillable="true" ma:displayName="MediaServiceSearchProperties" ma:hidden="true" ma:internalName="MediaServiceSearchProperties" ma:readOnly="true">
+      <xsd:simpleType>
+        <xsd:restriction base="dms:Note"/>
+      </xsd:simpleType>
+    </xsd:element>
+    <xsd:element name="MediaServiceObjectDetectorVersions" ma:index="13" nillable="true" ma:displayName="MediaServiceObjectDetectorVersions" ma:hidden="true" ma:indexed="true" ma:internalName="MediaServiceObjectDetectorVersions" ma:readOnly="true">
+      <xsd:simpleType>
+        <xsd:restriction base="dms:Text"/>
+      </xsd:simpleType>
+    </xsd:element>
+    <xsd:element name="lcf76f155ced4ddcb4097134ff3c332f" ma:index="15" nillable="true" ma:taxonomy="true" ma:internalName="lcf76f155ced4ddcb4097134ff3c332f" ma:taxonomyFieldName="MediaServiceImageTags" ma:displayName="Image Tags" ma:readOnly="false" ma:fieldId="{5cf76f15-5ced-4ddc-b409-7134ff3c332f}" ma:taxonomyMulti="true" ma:sspId="8d6e3770-24e9-436a-bfbb-e2969bf955db" ma:termSetId="09814cd3-568e-fe90-9814-8d621ff8fb84" ma:anchorId="fba54fb3-c3e1-fe81-a776-ca4b69148c4d" ma:open="true" ma:isKeyword="false">
       <xsd:complexType>
-        <xsd:complexContent>
-          <xsd:extension base="dms:MultiChoiceLookup">
-            <xsd:sequence>
-              <xsd:element name="Value" type="dms:Lookup" maxOccurs="unbounded" minOccurs="0" nillable="true"/>
-            </xsd:sequence>
-          </xsd:extension>
-        </xsd:complexContent>
+        <xsd:sequence>
+          <xsd:element ref="pc:Terms" minOccurs="0" maxOccurs="1"/>
+        </xsd:sequence>
       </xsd:complexType>
+    </xsd:element>
+    <xsd:element name="MediaServiceDateTaken" ma:index="16" nillable="true" ma:displayName="MediaServiceDateTaken" ma:hidden="true" ma:indexed="true" ma:internalName="MediaServiceDateTaken" ma:readOnly="true">
+      <xsd:simpleType>
+        <xsd:restriction base="dms:Text"/>
+      </xsd:simpleType>
+    </xsd:element>
+    <xsd:element name="MediaServiceOCR" ma:index="17" nillable="true" ma:displayName="Extracted Text" ma:internalName="MediaServiceOCR" ma:readOnly="true">
+      <xsd:simpleType>
+        <xsd:restriction base="dms:Note">
+          <xsd:maxLength value="255"/>
+        </xsd:restriction>
+      </xsd:simpleType>
+    </xsd:element>
+    <xsd:element name="MediaServiceGenerationTime" ma:index="18" nillable="true" ma:displayName="MediaServiceGenerationTime" ma:hidden="true" ma:internalName="MediaServiceGenerationTime" ma:readOnly="true">
+      <xsd:simpleType>
+        <xsd:restriction base="dms:Text"/>
+      </xsd:simpleType>
+    </xsd:element>
+    <xsd:element name="MediaServiceEventHashCode" ma:index="19" nillable="true" ma:displayName="MediaServiceEventHashCode" ma:hidden="true" ma:internalName="MediaServiceEventHashCode" ma:readOnly="true">
+      <xsd:simpleType>
+        <xsd:restriction base="dms:Text"/>
+      </xsd:simpleType>
     </xsd:element>
   </xsd:schema>
   <xsd:schema xmlns="http://schemas.openxmlformats.org/package/2006/metadata/core-properties" xmlns:xsd="http://www.w3.org/2001/XMLSchema" xmlns:xsi="http://www.w3.org/2001/XMLSchema-instance" xmlns:dc="http://purl.org/dc/elements/1.1/" xmlns:dcterms="http://purl.org/dc/terms/" xmlns:odoc="http://schemas.microsoft.com/internal/obd" targetNamespace="http://schemas.openxmlformats.org/package/2006/metadata/core-properties" elementFormDefault="qualified" attributeFormDefault="unqualified" blockDefault="#all">
@@ -3982,20 +3969,5 @@
 </file>
 
 <file path=customXml/itemProps3.xml><?xml version="1.0" encoding="utf-8"?>
-<ds:datastoreItem xmlns:ds="http://schemas.openxmlformats.org/officeDocument/2006/customXml" ds:itemID="{7B2B4E33-545F-491F-A1B1-D4A8A289F953}">
-  <ds:schemaRefs>
-    <ds:schemaRef ds:uri="http://schemas.microsoft.com/office/2006/metadata/contentType"/>
-    <ds:schemaRef ds:uri="http://schemas.microsoft.com/office/2006/metadata/properties/metaAttributes"/>
-    <ds:schemaRef ds:uri="http://www.w3.org/2001/XMLSchema"/>
-    <ds:schemaRef ds:uri="http://schemas.microsoft.com/office/2006/metadata/properties"/>
-    <ds:schemaRef ds:uri="a214f09a-5dcf-407b-9b35-f755cc36fe16"/>
-    <ds:schemaRef ds:uri="65bf6443-d88a-4841-95d2-0bd668e1d4ca"/>
-    <ds:schemaRef ds:uri="http://schemas.microsoft.com/office/2006/documentManagement/types"/>
-    <ds:schemaRef ds:uri="http://schemas.microsoft.com/office/infopath/2007/PartnerControls"/>
-    <ds:schemaRef ds:uri="http://schemas.openxmlformats.org/package/2006/metadata/core-properties"/>
-    <ds:schemaRef ds:uri="http://purl.org/dc/elements/1.1/"/>
-    <ds:schemaRef ds:uri="http://purl.org/dc/terms/"/>
-    <ds:schemaRef ds:uri="http://schemas.microsoft.com/internal/obd"/>
-  </ds:schemaRefs>
-</ds:datastoreItem>
+<ds:datastoreItem xmlns:ds="http://schemas.openxmlformats.org/officeDocument/2006/customXml" ds:itemID="{938D8C9F-B3E6-4261-9402-8D1250C58385}"/>
 </file>